--- a/Fotos y diagramas/creacion_diagramas.pptx
+++ b/Fotos y diagramas/creacion_diagramas.pptx
@@ -106,6 +106,11 @@
       </a:defRPr>
     </a:lvl9pPr>
   </p:defaultTextStyle>
+  <p:extLst>
+    <p:ext uri="{EFAFB233-063F-42B5-8137-9DF3F51BA10A}">
+      <p15:sldGuideLst xmlns:p15="http://schemas.microsoft.com/office/powerpoint/2012/main"/>
+    </p:ext>
+  </p:extLst>
 </p:presentation>
 </file>
 
@@ -256,7 +261,7 @@
           <a:p>
             <a:fld id="{197B2B0D-B83A-42FE-86A2-4188298E05E2}" type="datetimeFigureOut">
               <a:rPr lang="es-ES" smtClean="0"/>
-              <a:t>15/07/2025</a:t>
+              <a:t>16/07/2025</a:t>
             </a:fld>
             <a:endParaRPr lang="es-ES"/>
           </a:p>
@@ -454,7 +459,7 @@
           <a:p>
             <a:fld id="{197B2B0D-B83A-42FE-86A2-4188298E05E2}" type="datetimeFigureOut">
               <a:rPr lang="es-ES" smtClean="0"/>
-              <a:t>15/07/2025</a:t>
+              <a:t>16/07/2025</a:t>
             </a:fld>
             <a:endParaRPr lang="es-ES"/>
           </a:p>
@@ -662,7 +667,7 @@
           <a:p>
             <a:fld id="{197B2B0D-B83A-42FE-86A2-4188298E05E2}" type="datetimeFigureOut">
               <a:rPr lang="es-ES" smtClean="0"/>
-              <a:t>15/07/2025</a:t>
+              <a:t>16/07/2025</a:t>
             </a:fld>
             <a:endParaRPr lang="es-ES"/>
           </a:p>
@@ -860,7 +865,7 @@
           <a:p>
             <a:fld id="{197B2B0D-B83A-42FE-86A2-4188298E05E2}" type="datetimeFigureOut">
               <a:rPr lang="es-ES" smtClean="0"/>
-              <a:t>15/07/2025</a:t>
+              <a:t>16/07/2025</a:t>
             </a:fld>
             <a:endParaRPr lang="es-ES"/>
           </a:p>
@@ -1135,7 +1140,7 @@
           <a:p>
             <a:fld id="{197B2B0D-B83A-42FE-86A2-4188298E05E2}" type="datetimeFigureOut">
               <a:rPr lang="es-ES" smtClean="0"/>
-              <a:t>15/07/2025</a:t>
+              <a:t>16/07/2025</a:t>
             </a:fld>
             <a:endParaRPr lang="es-ES"/>
           </a:p>
@@ -1400,7 +1405,7 @@
           <a:p>
             <a:fld id="{197B2B0D-B83A-42FE-86A2-4188298E05E2}" type="datetimeFigureOut">
               <a:rPr lang="es-ES" smtClean="0"/>
-              <a:t>15/07/2025</a:t>
+              <a:t>16/07/2025</a:t>
             </a:fld>
             <a:endParaRPr lang="es-ES"/>
           </a:p>
@@ -1812,7 +1817,7 @@
           <a:p>
             <a:fld id="{197B2B0D-B83A-42FE-86A2-4188298E05E2}" type="datetimeFigureOut">
               <a:rPr lang="es-ES" smtClean="0"/>
-              <a:t>15/07/2025</a:t>
+              <a:t>16/07/2025</a:t>
             </a:fld>
             <a:endParaRPr lang="es-ES"/>
           </a:p>
@@ -1953,7 +1958,7 @@
           <a:p>
             <a:fld id="{197B2B0D-B83A-42FE-86A2-4188298E05E2}" type="datetimeFigureOut">
               <a:rPr lang="es-ES" smtClean="0"/>
-              <a:t>15/07/2025</a:t>
+              <a:t>16/07/2025</a:t>
             </a:fld>
             <a:endParaRPr lang="es-ES"/>
           </a:p>
@@ -2066,7 +2071,7 @@
           <a:p>
             <a:fld id="{197B2B0D-B83A-42FE-86A2-4188298E05E2}" type="datetimeFigureOut">
               <a:rPr lang="es-ES" smtClean="0"/>
-              <a:t>15/07/2025</a:t>
+              <a:t>16/07/2025</a:t>
             </a:fld>
             <a:endParaRPr lang="es-ES"/>
           </a:p>
@@ -2377,7 +2382,7 @@
           <a:p>
             <a:fld id="{197B2B0D-B83A-42FE-86A2-4188298E05E2}" type="datetimeFigureOut">
               <a:rPr lang="es-ES" smtClean="0"/>
-              <a:t>15/07/2025</a:t>
+              <a:t>16/07/2025</a:t>
             </a:fld>
             <a:endParaRPr lang="es-ES"/>
           </a:p>
@@ -2665,7 +2670,7 @@
           <a:p>
             <a:fld id="{197B2B0D-B83A-42FE-86A2-4188298E05E2}" type="datetimeFigureOut">
               <a:rPr lang="es-ES" smtClean="0"/>
-              <a:t>15/07/2025</a:t>
+              <a:t>16/07/2025</a:t>
             </a:fld>
             <a:endParaRPr lang="es-ES"/>
           </a:p>
@@ -2906,7 +2911,7 @@
           <a:p>
             <a:fld id="{197B2B0D-B83A-42FE-86A2-4188298E05E2}" type="datetimeFigureOut">
               <a:rPr lang="es-ES" smtClean="0"/>
-              <a:t>15/07/2025</a:t>
+              <a:t>16/07/2025</a:t>
             </a:fld>
             <a:endParaRPr lang="es-ES"/>
           </a:p>
@@ -4342,10 +4347,10 @@
       </p:sp>
       <p:sp>
         <p:nvSpPr>
-          <p:cNvPr id="14" name="Flecha: cuádruple 13">
-            <a:extLst>
-              <a:ext uri="{FF2B5EF4-FFF2-40B4-BE49-F238E27FC236}">
-                <a16:creationId xmlns:a16="http://schemas.microsoft.com/office/drawing/2014/main" id="{22CE6197-EBFB-CCE6-8B6C-8D9F82B38B7C}"/>
+          <p:cNvPr id="7" name="Diagrama de flujo: conector 6">
+            <a:extLst>
+              <a:ext uri="{FF2B5EF4-FFF2-40B4-BE49-F238E27FC236}">
+                <a16:creationId xmlns:a16="http://schemas.microsoft.com/office/drawing/2014/main" id="{9C049C15-85C2-F55A-1097-475F8DE6280C}"/>
               </a:ext>
             </a:extLst>
           </p:cNvPr>
@@ -4354,23 +4359,20 @@
         </p:nvSpPr>
         <p:spPr>
           <a:xfrm>
-            <a:off x="4141522" y="1178560"/>
-            <a:ext cx="4182347" cy="4002836"/>
-          </a:xfrm>
-          <a:prstGeom prst="quadArrow">
-            <a:avLst>
-              <a:gd name="adj1" fmla="val 2884"/>
-              <a:gd name="adj2" fmla="val 3973"/>
-              <a:gd name="adj3" fmla="val 0"/>
-            </a:avLst>
+            <a:off x="5713082" y="3342737"/>
+            <a:ext cx="533326" cy="536523"/>
+          </a:xfrm>
+          <a:prstGeom prst="flowChartConnector">
+            <a:avLst/>
           </a:prstGeom>
           <a:solidFill>
-            <a:schemeClr val="tx1"/>
+            <a:schemeClr val="accent5">
+              <a:lumMod val="60000"/>
+              <a:lumOff val="40000"/>
+            </a:schemeClr>
           </a:solidFill>
           <a:ln>
-            <a:solidFill>
-              <a:schemeClr val="tx1"/>
-            </a:solidFill>
+            <a:noFill/>
           </a:ln>
         </p:spPr>
         <p:style>
@@ -4400,6 +4402,118 @@
       </p:sp>
       <p:sp>
         <p:nvSpPr>
+          <p:cNvPr id="2" name="Diagrama de flujo: conector 1">
+            <a:extLst>
+              <a:ext uri="{FF2B5EF4-FFF2-40B4-BE49-F238E27FC236}">
+                <a16:creationId xmlns:a16="http://schemas.microsoft.com/office/drawing/2014/main" id="{B2F77E12-BF76-9878-1B61-450A05E51C0C}"/>
+              </a:ext>
+            </a:extLst>
+          </p:cNvPr>
+          <p:cNvSpPr/>
+          <p:nvPr/>
+        </p:nvSpPr>
+        <p:spPr>
+          <a:xfrm>
+            <a:off x="7807500" y="1134124"/>
+            <a:ext cx="533326" cy="536523"/>
+          </a:xfrm>
+          <a:prstGeom prst="flowChartConnector">
+            <a:avLst/>
+          </a:prstGeom>
+          <a:solidFill>
+            <a:schemeClr val="accent6">
+              <a:lumMod val="75000"/>
+            </a:schemeClr>
+          </a:solidFill>
+          <a:ln>
+            <a:noFill/>
+          </a:ln>
+        </p:spPr>
+        <p:style>
+          <a:lnRef idx="2">
+            <a:schemeClr val="accent1">
+              <a:shade val="15000"/>
+            </a:schemeClr>
+          </a:lnRef>
+          <a:fillRef idx="1">
+            <a:schemeClr val="accent1"/>
+          </a:fillRef>
+          <a:effectRef idx="0">
+            <a:schemeClr val="accent1"/>
+          </a:effectRef>
+          <a:fontRef idx="minor">
+            <a:schemeClr val="lt1"/>
+          </a:fontRef>
+        </p:style>
+        <p:txBody>
+          <a:bodyPr rtlCol="0" anchor="ctr"/>
+          <a:lstStyle/>
+          <a:p>
+            <a:pPr algn="ctr"/>
+            <a:endParaRPr lang="es-ES"/>
+          </a:p>
+        </p:txBody>
+      </p:sp>
+      <p:sp>
+        <p:nvSpPr>
+          <p:cNvPr id="14" name="Flecha: cuádruple 13">
+            <a:extLst>
+              <a:ext uri="{FF2B5EF4-FFF2-40B4-BE49-F238E27FC236}">
+                <a16:creationId xmlns:a16="http://schemas.microsoft.com/office/drawing/2014/main" id="{22CE6197-EBFB-CCE6-8B6C-8D9F82B38B7C}"/>
+              </a:ext>
+            </a:extLst>
+          </p:cNvPr>
+          <p:cNvSpPr/>
+          <p:nvPr/>
+        </p:nvSpPr>
+        <p:spPr>
+          <a:xfrm>
+            <a:off x="4141522" y="1178560"/>
+            <a:ext cx="4182347" cy="4002836"/>
+          </a:xfrm>
+          <a:prstGeom prst="quadArrow">
+            <a:avLst>
+              <a:gd name="adj1" fmla="val 2884"/>
+              <a:gd name="adj2" fmla="val 3973"/>
+              <a:gd name="adj3" fmla="val 0"/>
+            </a:avLst>
+          </a:prstGeom>
+          <a:solidFill>
+            <a:schemeClr val="tx1"/>
+          </a:solidFill>
+          <a:ln>
+            <a:solidFill>
+              <a:schemeClr val="tx1"/>
+            </a:solidFill>
+          </a:ln>
+        </p:spPr>
+        <p:style>
+          <a:lnRef idx="2">
+            <a:schemeClr val="accent1">
+              <a:shade val="15000"/>
+            </a:schemeClr>
+          </a:lnRef>
+          <a:fillRef idx="1">
+            <a:schemeClr val="accent1"/>
+          </a:fillRef>
+          <a:effectRef idx="0">
+            <a:schemeClr val="accent1"/>
+          </a:effectRef>
+          <a:fontRef idx="minor">
+            <a:schemeClr val="lt1"/>
+          </a:fontRef>
+        </p:style>
+        <p:txBody>
+          <a:bodyPr rtlCol="0" anchor="ctr"/>
+          <a:lstStyle/>
+          <a:p>
+            <a:pPr algn="ctr"/>
+            <a:endParaRPr lang="es-ES"/>
+          </a:p>
+        </p:txBody>
+      </p:sp>
+      <p:sp>
+        <p:nvSpPr>
           <p:cNvPr id="17" name="CuadroTexto 16">
             <a:extLst>
               <a:ext uri="{FF2B5EF4-FFF2-40B4-BE49-F238E27FC236}">
@@ -4520,6 +4634,61 @@
       </p:sp>
       <p:sp>
         <p:nvSpPr>
+          <p:cNvPr id="5" name="Diagrama de flujo: conector 4">
+            <a:extLst>
+              <a:ext uri="{FF2B5EF4-FFF2-40B4-BE49-F238E27FC236}">
+                <a16:creationId xmlns:a16="http://schemas.microsoft.com/office/drawing/2014/main" id="{57EA5DC1-F1DB-BA70-1337-25D5F81265B4}"/>
+              </a:ext>
+            </a:extLst>
+          </p:cNvPr>
+          <p:cNvSpPr/>
+          <p:nvPr/>
+        </p:nvSpPr>
+        <p:spPr>
+          <a:xfrm>
+            <a:off x="7258470" y="4275245"/>
+            <a:ext cx="533326" cy="536523"/>
+          </a:xfrm>
+          <a:prstGeom prst="flowChartConnector">
+            <a:avLst/>
+          </a:prstGeom>
+          <a:solidFill>
+            <a:schemeClr val="accent4">
+              <a:lumMod val="60000"/>
+              <a:lumOff val="40000"/>
+            </a:schemeClr>
+          </a:solidFill>
+          <a:ln>
+            <a:noFill/>
+          </a:ln>
+        </p:spPr>
+        <p:style>
+          <a:lnRef idx="2">
+            <a:schemeClr val="accent1">
+              <a:shade val="15000"/>
+            </a:schemeClr>
+          </a:lnRef>
+          <a:fillRef idx="1">
+            <a:schemeClr val="accent1"/>
+          </a:fillRef>
+          <a:effectRef idx="0">
+            <a:schemeClr val="accent1"/>
+          </a:effectRef>
+          <a:fontRef idx="minor">
+            <a:schemeClr val="lt1"/>
+          </a:fontRef>
+        </p:style>
+        <p:txBody>
+          <a:bodyPr rtlCol="0" anchor="ctr"/>
+          <a:lstStyle/>
+          <a:p>
+            <a:pPr algn="ctr"/>
+            <a:endParaRPr lang="es-ES"/>
+          </a:p>
+        </p:txBody>
+      </p:sp>
+      <p:sp>
+        <p:nvSpPr>
           <p:cNvPr id="30" name="CuadroTexto 29">
             <a:extLst>
               <a:ext uri="{FF2B5EF4-FFF2-40B4-BE49-F238E27FC236}">
@@ -4680,6 +4849,60 @@
       </p:sp>
       <p:sp>
         <p:nvSpPr>
+          <p:cNvPr id="6" name="Diagrama de flujo: conector 5">
+            <a:extLst>
+              <a:ext uri="{FF2B5EF4-FFF2-40B4-BE49-F238E27FC236}">
+                <a16:creationId xmlns:a16="http://schemas.microsoft.com/office/drawing/2014/main" id="{3EE1F495-0A81-598F-A82E-6378EE521D01}"/>
+              </a:ext>
+            </a:extLst>
+          </p:cNvPr>
+          <p:cNvSpPr/>
+          <p:nvPr/>
+        </p:nvSpPr>
+        <p:spPr>
+          <a:xfrm>
+            <a:off x="5223740" y="1941729"/>
+            <a:ext cx="533326" cy="536523"/>
+          </a:xfrm>
+          <a:prstGeom prst="flowChartConnector">
+            <a:avLst/>
+          </a:prstGeom>
+          <a:solidFill>
+            <a:schemeClr val="accent2">
+              <a:lumMod val="75000"/>
+            </a:schemeClr>
+          </a:solidFill>
+          <a:ln>
+            <a:noFill/>
+          </a:ln>
+        </p:spPr>
+        <p:style>
+          <a:lnRef idx="2">
+            <a:schemeClr val="accent1">
+              <a:shade val="15000"/>
+            </a:schemeClr>
+          </a:lnRef>
+          <a:fillRef idx="1">
+            <a:schemeClr val="accent1"/>
+          </a:fillRef>
+          <a:effectRef idx="0">
+            <a:schemeClr val="accent1"/>
+          </a:effectRef>
+          <a:fontRef idx="minor">
+            <a:schemeClr val="lt1"/>
+          </a:fontRef>
+        </p:style>
+        <p:txBody>
+          <a:bodyPr rtlCol="0" anchor="ctr"/>
+          <a:lstStyle/>
+          <a:p>
+            <a:pPr algn="ctr"/>
+            <a:endParaRPr lang="es-ES"/>
+          </a:p>
+        </p:txBody>
+      </p:sp>
+      <p:sp>
+        <p:nvSpPr>
           <p:cNvPr id="36" name="CuadroTexto 35">
             <a:extLst>
               <a:ext uri="{FF2B5EF4-FFF2-40B4-BE49-F238E27FC236}">
@@ -4732,7 +4955,7 @@
         </p:nvSpPr>
         <p:spPr>
           <a:xfrm>
-            <a:off x="5278037" y="1867609"/>
+            <a:off x="5329593" y="1905931"/>
             <a:ext cx="335348" cy="584775"/>
           </a:xfrm>
           <a:prstGeom prst="rect">
